--- a/presentations/prFBA_condensed_2026-10.pptx
+++ b/presentations/prFBA_condensed_2026-10.pptx
@@ -21,6 +21,7 @@
     <p:sldId id="269" r:id="rId21"/>
     <p:sldId id="270" r:id="rId22"/>
     <p:sldId id="271" r:id="rId23"/>
+    <p:sldId id="272" r:id="rId24"/>
   </p:sldIdLst>
   <p:sldSz cx="12191695" cy="6858000" type="screen4x3"/>
   <p:notesSz cx="6858000" cy="9144000"/>
@@ -1633,6 +1634,238 @@
                 </a:solidFill>
                 <a:latin typeface="Calibri"/>
               </a:rPr>
+              <a:t>Gene-backed reactions free to vary on the optimal face</a:t>
+            </a:r>
+          </a:p>
+        </c:rich>
+      </c:tx>
+      <c:layout/>
+      <c:overlay val="0"/>
+    </c:title>
+    <c:autoTitleDeleted val="1"/>
+    <c:plotArea>
+      <c:barChart>
+        <c:barDir val="bar"/>
+        <c:grouping val="clustered"/>
+        <c:ser>
+          <c:idx val="0"/>
+          <c:order val="0"/>
+          <c:tx>
+            <c:strRef>
+              <c:f>Sheet1!$B$1</c:f>
+              <c:strCache>
+                <c:ptCount val="1"/>
+                <c:pt idx="0">
+                  <c:v>v</c:v>
+                </c:pt>
+              </c:strCache>
+            </c:strRef>
+          </c:tx>
+          <c:dPt>
+            <c:idx val="0"/>
+            <c:spPr>
+              <a:solidFill>
+                <a:srgbClr val="E8871A"/>
+              </a:solidFill>
+            </c:spPr>
+          </c:dPt>
+          <c:dPt>
+            <c:idx val="1"/>
+            <c:spPr>
+              <a:solidFill>
+                <a:srgbClr val="028090"/>
+              </a:solidFill>
+            </c:spPr>
+          </c:dPt>
+          <c:dPt>
+            <c:idx val="2"/>
+            <c:spPr>
+              <a:solidFill>
+                <a:srgbClr val="5B7179"/>
+              </a:solidFill>
+            </c:spPr>
+          </c:dPt>
+          <c:dPt>
+            <c:idx val="3"/>
+            <c:spPr>
+              <a:solidFill>
+                <a:srgbClr val="5B7179"/>
+              </a:solidFill>
+            </c:spPr>
+          </c:dPt>
+          <c:dLbls>
+            <c:numFmt formatCode="0.0" sourceLinked="0"/>
+            <c:txPr>
+              <a:bodyPr/>
+              <a:lstStyle/>
+              <a:p>
+                <a:pPr>
+                  <a:defRPr sz="1400" b="1">
+                    <a:solidFill>
+                      <a:srgbClr val="10292E"/>
+                    </a:solidFill>
+                    <a:latin typeface="Calibri"/>
+                  </a:defRPr>
+                </a:pPr>
+              </a:p>
+            </c:txPr>
+            <c:dLblPos val="outEnd"/>
+            <c:showLegendKey val="0"/>
+            <c:showVal val="1"/>
+            <c:showCatName val="0"/>
+            <c:showSerName val="0"/>
+            <c:showPercent val="0"/>
+            <c:showBubbleSize val="0"/>
+            <c:showLeaderLines val="1"/>
+          </c:dLbls>
+          <c:cat>
+            <c:strRef>
+              <c:f>Sheet1!$A$2:$A$5</c:f>
+              <c:strCache>
+                <c:ptCount val="4"/>
+                <c:pt idx="0">
+                  <c:v>shuffled p</c:v>
+                </c:pt>
+                <c:pt idx="1">
+                  <c:v>real p</c:v>
+                </c:pt>
+                <c:pt idx="2">
+                  <c:v>plain parsimony</c:v>
+                </c:pt>
+                <c:pt idx="3">
+                  <c:v>two-tier (p = 1)</c:v>
+                </c:pt>
+              </c:strCache>
+            </c:strRef>
+          </c:cat>
+          <c:val>
+            <c:numRef>
+              <c:f>Sheet1!$B$2:$B$5</c:f>
+              <c:numCache>
+                <c:formatCode>0.0</c:formatCode>
+                <c:ptCount val="4"/>
+                <c:pt idx="0">
+                  <c:v>27.85750493374683</c:v>
+                </c:pt>
+                <c:pt idx="1">
+                  <c:v>32.676580208627016</c:v>
+                </c:pt>
+                <c:pt idx="2">
+                  <c:v>41.75893149140119</c:v>
+                </c:pt>
+                <c:pt idx="3">
+                  <c:v>41.53942486608402</c:v>
+                </c:pt>
+              </c:numCache>
+            </c:numRef>
+          </c:val>
+        </c:ser>
+        <c:gapWidth val="70"/>
+        <c:axId val="-2068027336"/>
+        <c:axId val="-2113994440"/>
+      </c:barChart>
+      <c:catAx>
+        <c:axId val="-2068027336"/>
+        <c:scaling>
+          <c:orientation val="minMax"/>
+        </c:scaling>
+        <c:delete val="0"/>
+        <c:axPos val="l"/>
+        <c:majorTickMark val="out"/>
+        <c:minorTickMark val="none"/>
+        <c:tickLblPos val="nextTo"/>
+        <c:txPr>
+          <a:bodyPr/>
+          <a:lstStyle/>
+          <a:p>
+            <a:pPr>
+              <a:defRPr sz="1200">
+                <a:solidFill>
+                  <a:srgbClr val="10292E"/>
+                </a:solidFill>
+              </a:defRPr>
+            </a:pPr>
+          </a:p>
+        </c:txPr>
+        <c:crossAx val="-2113994440"/>
+        <c:crosses val="autoZero"/>
+        <c:auto val="1"/>
+        <c:lblAlgn val="ctr"/>
+        <c:lblOffset val="100"/>
+        <c:noMultiLvlLbl val="0"/>
+      </c:catAx>
+      <c:valAx>
+        <c:axId val="-2113994440"/>
+        <c:scaling>
+          <c:min val="0.0"/>
+        </c:scaling>
+        <c:delete/>
+        <c:axPos val="b"/>
+        <c:majorTickMark val="out"/>
+        <c:minorTickMark val="none"/>
+        <c:tickLblPos val="nextTo"/>
+        <c:spPr>
+          <a:ln>
+            <a:noFill/>
+          </a:ln>
+        </c:spPr>
+        <c:txPr>
+          <a:bodyPr/>
+          <a:lstStyle/>
+          <a:p>
+            <a:pPr>
+              <a:defRPr sz="1100">
+                <a:solidFill>
+                  <a:srgbClr val="5B7179"/>
+                </a:solidFill>
+              </a:defRPr>
+            </a:pPr>
+          </a:p>
+        </c:txPr>
+        <c:crossAx val="-2068027336"/>
+        <c:crosses val="autoZero"/>
+      </c:valAx>
+    </c:plotArea>
+    <c:dispBlanksAs val="gap"/>
+  </c:chart>
+  <c:txPr>
+    <a:bodyPr/>
+    <a:lstStyle/>
+    <a:p>
+      <a:pPr>
+        <a:defRPr sz="1200">
+          <a:solidFill>
+            <a:srgbClr val="5B7179"/>
+          </a:solidFill>
+          <a:latin typeface="Calibri"/>
+        </a:defRPr>
+      </a:pPr>
+      <a:endParaRPr lang="en-US"/>
+    </a:p>
+  </c:txPr>
+  <c:externalData r:id="rId1">
+    <c:autoUpdate val="0"/>
+  </c:externalData>
+</c:chartSpace>
+</file>
+
+<file path=ppt/charts/chart6.xml><?xml version="1.0" encoding="utf-8"?>
+<c:chartSpace xmlns:c="http://schemas.openxmlformats.org/drawingml/2006/chart" xmlns:a="http://schemas.openxmlformats.org/drawingml/2006/main" xmlns:r="http://schemas.openxmlformats.org/officeDocument/2006/relationships">
+  <c:date1904 val="0"/>
+  <c:chart>
+    <c:title>
+      <c:tx>
+        <c:rich>
+          <a:bodyPr/>
+          <a:lstStyle/>
+          <a:p>
+            <a:r>
+              <a:rPr sz="1300" b="1">
+                <a:solidFill>
+                  <a:srgbClr val="10292E"/>
+                </a:solidFill>
+                <a:latin typeface="Calibri"/>
+              </a:rPr>
               <a:t>MAG − 16S gene-capture F1 by completeness (uneven steps; 0 = a tie)</a:t>
             </a:r>
           </a:p>
@@ -2157,7 +2390,7 @@
 </c:chartSpace>
 </file>
 
-<file path=ppt/charts/chart6.xml><?xml version="1.0" encoding="utf-8"?>
+<file path=ppt/charts/chart7.xml><?xml version="1.0" encoding="utf-8"?>
 <c:chartSpace xmlns:c="http://schemas.openxmlformats.org/drawingml/2006/chart" xmlns:a="http://schemas.openxmlformats.org/drawingml/2006/main" xmlns:r="http://schemas.openxmlformats.org/officeDocument/2006/relationships">
   <c:date1904 val="0"/>
   <c:chart>
@@ -3137,7 +3370,7 @@
           <a:lstStyle/>
           <a:p>
             <a:r>
-              <a:t>Paired within organism against the amplicon arm's own cells (depth-100 records, exact-tie union, as in tab:main), the MAG arm leads full-length 16S by +0.103 in gene-capture F1 at full completeness and still by +0.077 at 1%, fifty-fold below MIMAG's medium-quality floor and not a bin any study would keep; against V4 the lead is +0.212 and +0.190. At 1% the MAG arm still wins 1,129 organisms to 473 against full-length 16S, and every one of the 28 paired tests has Wilcoxon p ≤ 1e-79. Across all 8 regions at full completeness the lead follows the variable region, not amplicon length: +0.103 to +0.116 against full-length 16S and the two V1-anchored regions, +0.168 to +0.212 against the five that start at V3 or later, with V4 the widest gap. The reason is structural: the prediction is the gene content of the selected reference genome, not of the MAG, so completeness matters only if it changes which reference is chosen, and ANI is robust enough that it rarely does. What degrades is coverage, not quality: the resolve rate falls from 0.308 to 0.253 as the remaining sequence stops clearing skani's screen, while conditional F1 drops by only 0.024. All of this is conditional on both arms answering; over the whole population, scoring an abstention as zero, the amplicon arm wins, 0.605 against 0.248 for full-length 16S, because the MAG arm answers for only about 31% of organisms (see the abstention slide).</a:t>
+              <a:t>A declared, post-hoc in-silico test of the prFBA objective (design and results: region_validation/shared_reference/WEIGHTED_OBJECTIVE_TEST.md and WEIGHTED_OBJECTIVE_RESULTS.md). Each amplicon's union is built into a gapfilled ModelSEED model, and the objective is solved with real p, with every gene-backed p = 1 (what a single-genome selection gives), with p shuffled among the gene-backed reactions, with plain parsimony, and with an oracle that prices only the reactions the source genome's own draft lacks. Flux is measured over the whole optimal face, as a fraction of the two-tier arm's gene-backed flux. Real p lowers truth-absent flux by −0.61 points [−0.97, −0.25] at the face midpoint, below the 1-point smallest effect of interest; at the face minimum the interval includes 0 (−0.25 [−0.53, +0.11]). Real minus shuffled p is −1.20 points; the oracle reaches −2.49 points, so p achieves 24% of what the oracle weighting achieves. Degeneracy falls from 41.5 to 32.7 variable gene-backed reactions (−8.9 [−10.3, −7.5]), but shuffled p leaves fewer still (27.9; real minus shuffled +4.8), so the tie-breaking comes from any gradation of the costs, not from p's information. The exchange term is about 99% of the objective and is the same under every weighting on 357 of 360 amplicons, so the internal weights only choose among solutions of equal exchange flux. At n = 1 the weighted and two-tier objectives return identical solutions (60 of 60). The released single-model path of MSProbability.prFBA does not run as shipped; the test used a corrected copy, checked on every amplicon against the released source run with its two failing lines corrected (360 of 360); a fix is committed on ModelSEEDpy branch fix-prfba-single-model (b6857a0). Truth is an annotation-level proxy; the decision rules were amended after a 10-amplicon smoke, before the full run.</a:t>
             </a:r>
           </a:p>
         </p:txBody>
@@ -3207,7 +3440,7 @@
           <a:lstStyle/>
           <a:p>
             <a:r>
-              <a:t>Every rate here is phylum-standardized over the 113 phyla present in all three panels, restricted to organisms with a full-length best 16S, under self-exclusion at τ = 0.987, with all three panels scored at record depth 100 under the exact-tie union; intervals are 1,000 phylum-stratified bootstrap replicates. The chart shows V4: genus coverage is 0.615, 0.431 and 0.358 on the stratified, k-means and random panels, a random-minus-stratified difference of −0.257 (−0.276 to −0.238) against −0.330 crude. In every region, genus and gene-capture coverage fall by 0.20 to 0.29 on the random panel, every interval excludes zero, and the standardized gap keeps 76–92% of the crude one, so composition is a minority of it. Quality given an answer moves far less. Conditional genus accuracy is higher on both alternative panels than on the stratified one in every region, by up to 0.07 (random minus stratified excludes zero in 2 of 8 regions). Conditional family accuracy differs by at most 0.05 between any two panels, and conditional gene-capture F1 by at most 0.028: it is lower on the random panel by 0.013 to 0.028, an order of magnitude below the coverage gap; the MAG arm, scored against each panel as its own reference, stays within the same bound.</a:t>
+              <a:t>Paired within organism against the amplicon arm's own cells (depth-100 records, exact-tie union, as in tab:main), the MAG arm leads full-length 16S by +0.103 in gene-capture F1 at full completeness and still by +0.077 at 1%, fifty-fold below MIMAG's medium-quality floor and not a bin any study would keep; against V4 the lead is +0.212 and +0.190. At 1% the MAG arm still wins 1,129 organisms to 473 against full-length 16S, and every one of the 28 paired tests has Wilcoxon p ≤ 1e-79. Across all 8 regions at full completeness the lead follows the variable region, not amplicon length: +0.103 to +0.116 against full-length 16S and the two V1-anchored regions, +0.168 to +0.212 against the five that start at V3 or later, with V4 the widest gap. The reason is structural: the prediction is the gene content of the selected reference genome, not of the MAG, so completeness matters only if it changes which reference is chosen, and ANI is robust enough that it rarely does. What degrades is coverage, not quality: the resolve rate falls from 0.308 to 0.253 as the remaining sequence stops clearing skani's screen, while conditional F1 drops by only 0.024. All of this is conditional on both arms answering; over the whole population, scoring an abstention as zero, the amplicon arm wins, 0.605 against 0.248 for full-length 16S, because the MAG arm answers for only about 31% of organisms (see the abstention slide).</a:t>
             </a:r>
           </a:p>
         </p:txBody>
@@ -3233,6 +3466,76 @@
 </file>
 
 <file path=ppt/notesSlides/notesSlide14.xml><?xml version="1.0" encoding="utf-8"?>
+<p:notes xmlns:a="http://schemas.openxmlformats.org/drawingml/2006/main" xmlns:p="http://schemas.openxmlformats.org/presentationml/2006/main" xmlns:r="http://schemas.openxmlformats.org/officeDocument/2006/relationships">
+  <p:cSld>
+    <p:spTree>
+      <p:nvGrpSpPr>
+        <p:cNvPr id="1" name=""/>
+        <p:cNvGrpSpPr/>
+        <p:nvPr/>
+      </p:nvGrpSpPr>
+      <p:grpSpPr>
+        <a:xfrm>
+          <a:off x="0" y="0"/>
+          <a:ext cx="0" cy="0"/>
+          <a:chOff x="0" y="0"/>
+          <a:chExt cx="0" cy="0"/>
+        </a:xfrm>
+      </p:grpSpPr>
+      <p:sp>
+        <p:nvSpPr>
+          <p:cNvPr id="2" name="Slide Image Placeholder 1"/>
+          <p:cNvSpPr>
+            <a:spLocks noGrp="1"/>
+          </p:cNvSpPr>
+          <p:nvPr>
+            <p:ph type="sldImg" idx="2"/>
+          </p:nvPr>
+        </p:nvSpPr>
+        <p:spPr/>
+      </p:sp>
+      <p:sp>
+        <p:nvSpPr>
+          <p:cNvPr id="3" name="Notes Placeholder 2"/>
+          <p:cNvSpPr>
+            <a:spLocks noGrp="1"/>
+          </p:cNvSpPr>
+          <p:nvPr>
+            <p:ph type="body" idx="3" sz="quarter"/>
+          </p:nvPr>
+        </p:nvSpPr>
+        <p:spPr/>
+        <p:txBody>
+          <a:bodyPr/>
+          <a:lstStyle/>
+          <a:p>
+            <a:r>
+              <a:t>Every rate here is phylum-standardized over the 113 phyla present in all three panels, restricted to organisms with a full-length best 16S, under self-exclusion at τ = 0.987, with all three panels scored at record depth 100 under the exact-tie union; intervals are 1,000 phylum-stratified bootstrap replicates. The chart shows V4: genus coverage is 0.615, 0.431 and 0.358 on the stratified, k-means and random panels, a random-minus-stratified difference of −0.257 (−0.276 to −0.238) against −0.330 crude. In every region, genus and gene-capture coverage fall by 0.20 to 0.29 on the random panel, every interval excludes zero, and the standardized gap keeps 76–92% of the crude one, so composition is a minority of it. Quality given an answer moves far less. Conditional genus accuracy is higher on both alternative panels than on the stratified one in every region, by up to 0.07 (random minus stratified excludes zero in 2 of 8 regions). Conditional family accuracy differs by at most 0.05 between any two panels, and conditional gene-capture F1 by at most 0.028: it is lower on the random panel by 0.013 to 0.028, an order of magnitude below the coverage gap; the MAG arm, scored against each panel as its own reference, stays within the same bound.</a:t>
+            </a:r>
+          </a:p>
+        </p:txBody>
+      </p:sp>
+      <p:sp>
+        <p:nvSpPr>
+          <p:cNvPr id="4" name="Slide Number Placeholder 3"/>
+          <p:cNvSpPr>
+            <a:spLocks noGrp="1"/>
+          </p:cNvSpPr>
+          <p:nvPr>
+            <p:ph type="sldNum" idx="5" sz="quarter"/>
+          </p:nvPr>
+        </p:nvSpPr>
+        <p:spPr/>
+      </p:sp>
+    </p:spTree>
+  </p:cSld>
+  <p:clrMapOvr>
+    <a:masterClrMapping/>
+  </p:clrMapOvr>
+</p:notes>
+</file>
+
+<file path=ppt/notesSlides/notesSlide15.xml><?xml version="1.0" encoding="utf-8"?>
 <p:notes xmlns:a="http://schemas.openxmlformats.org/drawingml/2006/main" xmlns:p="http://schemas.openxmlformats.org/presentationml/2006/main" xmlns:r="http://schemas.openxmlformats.org/officeDocument/2006/relationships">
   <p:cSld>
     <p:spTree>
@@ -9160,6 +9463,331 @@
                 </a:solidFill>
                 <a:latin typeface="Cambria"/>
               </a:rPr>
+              <a:t>The weight breaks ties; so does any gradation</a:t>
+            </a:r>
+          </a:p>
+          <a:p>
+            <a:pPr algn="l">
+              <a:spcAft>
+                <a:spcPts val="0"/>
+              </a:spcAft>
+            </a:pPr>
+            <a:r>
+              <a:rPr sz="1350" b="0" i="0">
+                <a:solidFill>
+                  <a:srgbClr val="5B7179"/>
+                </a:solidFill>
+                <a:latin typeface="Calibri"/>
+              </a:rPr>
+              <a:t>Does p steer flux toward the true organism's functions?</a:t>
+            </a:r>
+          </a:p>
+        </p:txBody>
+      </p:sp>
+      <p:graphicFrame>
+        <p:nvGraphicFramePr>
+          <p:cNvPr id="3" name="Chart 2"/>
+          <p:cNvGraphicFramePr>
+            <a:graphicFrameLocks noGrp="1"/>
+          </p:cNvGraphicFramePr>
+          <p:nvPr/>
+        </p:nvGraphicFramePr>
+        <p:xfrm>
+          <a:off x="548640" y="1417320"/>
+          <a:ext cx="6720840" cy="3840480"/>
+        </p:xfrm>
+        <a:graphic>
+          <a:graphicData uri="http://schemas.openxmlformats.org/drawingml/2006/chart">
+            <c:chart xmlns:c="http://schemas.openxmlformats.org/drawingml/2006/chart" r:id="rId2"/>
+          </a:graphicData>
+        </a:graphic>
+      </p:graphicFrame>
+      <p:sp>
+        <p:nvSpPr>
+          <p:cNvPr id="4" name="Rounded Rectangle 3"/>
+          <p:cNvSpPr/>
+          <p:nvPr/>
+        </p:nvSpPr>
+        <p:spPr>
+          <a:xfrm>
+            <a:off x="7635240" y="1691640"/>
+            <a:ext cx="4007815" cy="1371600"/>
+          </a:xfrm>
+          <a:prstGeom prst="roundRect">
+            <a:avLst>
+              <a:gd name="adj" fmla="val 6000"/>
+            </a:avLst>
+          </a:prstGeom>
+          <a:solidFill>
+            <a:srgbClr val="EFF5F5"/>
+          </a:solidFill>
+          <a:ln>
+            <a:noFill/>
+          </a:ln>
+          <a:effectLst/>
+        </p:spPr>
+        <p:style>
+          <a:lnRef idx="1">
+            <a:schemeClr val="accent1"/>
+          </a:lnRef>
+          <a:fillRef idx="3">
+            <a:schemeClr val="accent1"/>
+          </a:fillRef>
+          <a:effectRef idx="2">
+            <a:schemeClr val="accent1"/>
+          </a:effectRef>
+          <a:fontRef idx="minor">
+            <a:schemeClr val="lt1"/>
+          </a:fontRef>
+        </p:style>
+        <p:txBody>
+          <a:bodyPr rtlCol="0" anchor="ctr" wrap="square" lIns="128016" rIns="128016" tIns="109728" bIns="109728"/>
+          <a:lstStyle/>
+          <a:p>
+            <a:pPr algn="l">
+              <a:spcAft>
+                <a:spcPts val="100"/>
+              </a:spcAft>
+            </a:pPr>
+            <a:r>
+              <a:rPr sz="2800" b="1" i="0">
+                <a:solidFill>
+                  <a:srgbClr val="028090"/>
+                </a:solidFill>
+                <a:latin typeface="Cambria"/>
+              </a:rPr>
+              <a:t>−0.61 pts</a:t>
+            </a:r>
+          </a:p>
+          <a:p>
+            <a:pPr algn="l">
+              <a:lnSpc>
+                <a:spcPct val="92000"/>
+              </a:lnSpc>
+              <a:spcAft>
+                <a:spcPts val="0"/>
+              </a:spcAft>
+            </a:pPr>
+            <a:r>
+              <a:rPr sz="1150" b="0" i="0">
+                <a:solidFill>
+                  <a:srgbClr val="5B7179"/>
+                </a:solidFill>
+                <a:latin typeface="Calibri"/>
+              </a:rPr>
+              <a:t>truth-absent flux, % of gene-backed, real p vs two-tier [−0.97, −0.25]; SESOI 1 pt</a:t>
+            </a:r>
+          </a:p>
+        </p:txBody>
+      </p:sp>
+      <p:sp>
+        <p:nvSpPr>
+          <p:cNvPr id="5" name="Rounded Rectangle 4"/>
+          <p:cNvSpPr/>
+          <p:nvPr/>
+        </p:nvSpPr>
+        <p:spPr>
+          <a:xfrm>
+            <a:off x="7635240" y="3337560"/>
+            <a:ext cx="4007815" cy="1371600"/>
+          </a:xfrm>
+          <a:prstGeom prst="roundRect">
+            <a:avLst>
+              <a:gd name="adj" fmla="val 6000"/>
+            </a:avLst>
+          </a:prstGeom>
+          <a:solidFill>
+            <a:srgbClr val="EFF5F5"/>
+          </a:solidFill>
+          <a:ln>
+            <a:noFill/>
+          </a:ln>
+          <a:effectLst/>
+        </p:spPr>
+        <p:style>
+          <a:lnRef idx="1">
+            <a:schemeClr val="accent1"/>
+          </a:lnRef>
+          <a:fillRef idx="3">
+            <a:schemeClr val="accent1"/>
+          </a:fillRef>
+          <a:effectRef idx="2">
+            <a:schemeClr val="accent1"/>
+          </a:effectRef>
+          <a:fontRef idx="minor">
+            <a:schemeClr val="lt1"/>
+          </a:fontRef>
+        </p:style>
+        <p:txBody>
+          <a:bodyPr rtlCol="0" anchor="ctr" wrap="square" lIns="128016" rIns="128016" tIns="109728" bIns="109728"/>
+          <a:lstStyle/>
+          <a:p>
+            <a:pPr algn="l">
+              <a:spcAft>
+                <a:spcPts val="100"/>
+              </a:spcAft>
+            </a:pPr>
+            <a:r>
+              <a:rPr sz="2800" b="1" i="0">
+                <a:solidFill>
+                  <a:srgbClr val="028090"/>
+                </a:solidFill>
+                <a:latin typeface="Cambria"/>
+              </a:rPr>
+              <a:t>24%</a:t>
+            </a:r>
+          </a:p>
+          <a:p>
+            <a:pPr algn="l">
+              <a:lnSpc>
+                <a:spcPct val="92000"/>
+              </a:lnSpc>
+              <a:spcAft>
+                <a:spcPts val="0"/>
+              </a:spcAft>
+            </a:pPr>
+            <a:r>
+              <a:rPr sz="1150" b="0" i="0">
+                <a:solidFill>
+                  <a:srgbClr val="5B7179"/>
+                </a:solidFill>
+                <a:latin typeface="Calibri"/>
+              </a:rPr>
+              <a:t>of what an oracle weighting achieves</a:t>
+            </a:r>
+          </a:p>
+        </p:txBody>
+      </p:sp>
+      <p:sp>
+        <p:nvSpPr>
+          <p:cNvPr id="6" name="TextBox 5"/>
+          <p:cNvSpPr txBox="1"/>
+          <p:nvPr/>
+        </p:nvSpPr>
+        <p:spPr>
+          <a:xfrm>
+            <a:off x="548640" y="5257800"/>
+            <a:ext cx="11094415" cy="548640"/>
+          </a:xfrm>
+          <a:prstGeom prst="rect">
+            <a:avLst/>
+          </a:prstGeom>
+          <a:noFill/>
+        </p:spPr>
+        <p:txBody>
+          <a:bodyPr wrap="square" lIns="0" rIns="0" tIns="0" bIns="0" anchor="t">
+            <a:spAutoFit/>
+          </a:bodyPr>
+          <a:lstStyle/>
+          <a:p>
+            <a:pPr algn="ctr">
+              <a:spcAft>
+                <a:spcPts val="0"/>
+              </a:spcAft>
+            </a:pPr>
+            <a:r>
+              <a:rPr sz="1800" b="1" i="0">
+                <a:solidFill>
+                  <a:srgbClr val="028090"/>
+                </a:solidFill>
+                <a:latin typeface="Cambria"/>
+              </a:rPr>
+              <a:t>Exchange term dominates: the weights only pick among ties</a:t>
+            </a:r>
+          </a:p>
+        </p:txBody>
+      </p:sp>
+      <p:sp>
+        <p:nvSpPr>
+          <p:cNvPr id="7" name="TextBox 6"/>
+          <p:cNvSpPr txBox="1"/>
+          <p:nvPr/>
+        </p:nvSpPr>
+        <p:spPr>
+          <a:xfrm>
+            <a:off x="548640" y="6309360"/>
+            <a:ext cx="11094415" cy="274320"/>
+          </a:xfrm>
+          <a:prstGeom prst="rect">
+            <a:avLst/>
+          </a:prstGeom>
+          <a:noFill/>
+        </p:spPr>
+        <p:txBody>
+          <a:bodyPr wrap="square" lIns="0" rIns="0" tIns="0" bIns="0" anchor="t">
+            <a:spAutoFit/>
+          </a:bodyPr>
+          <a:lstStyle/>
+          <a:p>
+            <a:pPr algn="l">
+              <a:spcAft>
+                <a:spcPts val="0"/>
+              </a:spcAft>
+            </a:pPr>
+            <a:r>
+              <a:rPr sz="1100" b="0" i="0">
+                <a:solidFill>
+                  <a:srgbClr val="5B7179"/>
+                </a:solidFill>
+                <a:latin typeface="Calibri"/>
+              </a:rPr>
+              <a:t>Declared post hoc · 300 multi-genome + 60 single-genome amplicons, leave-genus-out benchmark · pooled n ≥ 2, 95% group-cluster CI</a:t>
+            </a:r>
+          </a:p>
+        </p:txBody>
+      </p:sp>
+    </p:spTree>
+  </p:cSld>
+  <p:clrMapOvr>
+    <a:masterClrMapping/>
+  </p:clrMapOvr>
+</p:sld>
+</file>
+
+<file path=ppt/slides/slide15.xml><?xml version="1.0" encoding="utf-8"?>
+<p:sld xmlns:a="http://schemas.openxmlformats.org/drawingml/2006/main" xmlns:p="http://schemas.openxmlformats.org/presentationml/2006/main" xmlns:r="http://schemas.openxmlformats.org/officeDocument/2006/relationships">
+  <p:cSld>
+    <p:spTree>
+      <p:nvGrpSpPr>
+        <p:cNvPr id="1" name=""/>
+        <p:cNvGrpSpPr/>
+        <p:nvPr/>
+      </p:nvGrpSpPr>
+      <p:grpSpPr/>
+      <p:sp>
+        <p:nvSpPr>
+          <p:cNvPr id="2" name="TextBox 1"/>
+          <p:cNvSpPr txBox="1"/>
+          <p:nvPr/>
+        </p:nvSpPr>
+        <p:spPr>
+          <a:xfrm>
+            <a:off x="548640" y="384048"/>
+            <a:ext cx="11094415" cy="777240"/>
+          </a:xfrm>
+          <a:prstGeom prst="rect">
+            <a:avLst/>
+          </a:prstGeom>
+          <a:noFill/>
+        </p:spPr>
+        <p:txBody>
+          <a:bodyPr wrap="square" lIns="0" rIns="0" tIns="0" bIns="0" anchor="t">
+            <a:spAutoFit/>
+          </a:bodyPr>
+          <a:lstStyle/>
+          <a:p>
+            <a:pPr algn="l">
+              <a:spcAft>
+                <a:spcPts val="200"/>
+              </a:spcAft>
+            </a:pPr>
+            <a:r>
+              <a:rPr sz="3000" b="1" i="0">
+                <a:solidFill>
+                  <a:srgbClr val="10292E"/>
+                </a:solidFill>
+                <a:latin typeface="Cambria"/>
+              </a:rPr>
               <a:t>No completeness at which the amplicon catches up</a:t>
             </a:r>
           </a:p>
@@ -9498,7 +10126,7 @@
 </p:sld>
 </file>
 
-<file path=ppt/slides/slide15.xml><?xml version="1.0" encoding="utf-8"?>
+<file path=ppt/slides/slide16.xml><?xml version="1.0" encoding="utf-8"?>
 <p:sld xmlns:a="http://schemas.openxmlformats.org/drawingml/2006/main" xmlns:p="http://schemas.openxmlformats.org/presentationml/2006/main" xmlns:r="http://schemas.openxmlformats.org/officeDocument/2006/relationships">
   <p:cSld>
     <p:spTree>
@@ -9862,7 +10490,7 @@
 </p:sld>
 </file>
 
-<file path=ppt/slides/slide16.xml><?xml version="1.0" encoding="utf-8"?>
+<file path=ppt/slides/slide17.xml><?xml version="1.0" encoding="utf-8"?>
 <p:sld xmlns:a="http://schemas.openxmlformats.org/drawingml/2006/main" xmlns:p="http://schemas.openxmlformats.org/presentationml/2006/main" xmlns:r="http://schemas.openxmlformats.org/officeDocument/2006/relationships">
   <p:cSld>
     <p:bg>

--- a/presentations/prFBA_condensed_2026-10.pptx
+++ b/presentations/prFBA_condensed_2026-10.pptx
@@ -3160,7 +3160,7 @@
           <a:lstStyle/>
           <a:p>
             <a:r>
-              <a:t>A condensed version of the October update deck: four slides of method, each built on one figure, then the validation results. Every benchmark number is at the standard record depth of 100 hits under the shipped exact-tie union selection rule, and every value is read from the pipeline's result files by the same loader the full deck uses. The full deck carries the alignment engineering, the C12 diagnosis, the depth and rule decisions, the MAG build details and the audit trail.</a:t>
+              <a:t>A condensed version of the October update deck: the method, each slide built on one figure, then the validation results. Every benchmark number is at the standard record depth of 100 hits under the shipped exact-tie union selection rule, and every value is read from the pipeline's result files by the same loader the full deck uses. The full deck carries the alignment engineering, the C12 diagnosis, the depth and rule decisions, the MAG build details and the audit trail.</a:t>
             </a:r>
           </a:p>
         </p:txBody>
@@ -7265,7 +7265,7 @@
                 </a:solidFill>
                 <a:latin typeface="Calibri"/>
               </a:rPr>
-              <a:t>The method in four figures</a:t>
+              <a:t>One amplicon, end to end</a:t>
             </a:r>
           </a:p>
         </p:txBody>
